--- a/presentations/02-platform-and-design/02-platform-and-design-lecture.pptx
+++ b/presentations/02-platform-and-design/02-platform-and-design-lecture.pptx
@@ -139,7 +139,7 @@
   <p:extLst>
     <p:ext uri="{521415D9-36F7-43E2-AB2F-B90AF26B5E84}">
       <p14:sectionLst xmlns:p14="http://schemas.microsoft.com/office/powerpoint/2010/main">
-        <p14:section name="Opening" id="{111efe52-a365-d9af-04dc-19c8679c54fd}">
+        <p14:section name="Opening" id="{f8dde4da-dd8c-0275-58a7-b553d27a1bcd}">
           <p14:sldIdLst>
             <p14:sldId id="256"/>
             <p14:sldId id="257"/>
@@ -151,7 +151,7 @@
             <p14:sldId id="263"/>
           </p14:sldIdLst>
         </p14:section>
-        <p14:section name="The screen" id="{988e376d-9bb8-b0ca-920b-ed815d24e3e8}">
+        <p14:section name="The screen" id="{a1dbce14-a6e6-6e9d-2c91-104ae769374b}">
           <p14:sldIdLst>
             <p14:sldId id="264"/>
             <p14:sldId id="265"/>
@@ -164,7 +164,7 @@
             <p14:sldId id="272"/>
           </p14:sldIdLst>
         </p14:section>
-        <p14:section name="Input" id="{ec8c206b-fa76-609e-de31-ede18bebdcad}">
+        <p14:section name="Input" id="{e57b50f2-2c0e-c527-c800-c2fa8770ef24}">
           <p14:sldIdLst>
             <p14:sldId id="273"/>
             <p14:sldId id="274"/>
@@ -172,7 +172,7 @@
             <p14:sldId id="276"/>
           </p14:sldIdLst>
         </p14:section>
-        <p14:section name="Sound and cartridges" id="{43efc0f9-31a2-021e-274c-e21362839319}">
+        <p14:section name="Sound and cartridges" id="{3f0263d1-d452-3355-4ce0-2bc0566032ff}">
           <p14:sldIdLst>
             <p14:sldId id="277"/>
             <p14:sldId id="278"/>
@@ -183,7 +183,7 @@
             <p14:sldId id="283"/>
           </p14:sldIdLst>
         </p14:section>
-        <p14:section name="Design principles" id="{dc845aae-bdd2-690f-cb44-ffd485c7b160}">
+        <p14:section name="Design principles" id="{7fc36f34-d4c9-99a7-e01c-777d17d730b2}">
           <p14:sldIdLst>
             <p14:sldId id="284"/>
             <p14:sldId id="285"/>
@@ -191,7 +191,7 @@
             <p14:sldId id="287"/>
           </p14:sldIdLst>
         </p14:section>
-        <p14:section name="Closing" id="{b04fe397-5a71-064a-ce07-2edb07ddcea8}">
+        <p14:section name="Closing" id="{79c35762-b0d1-f8cb-d69e-c89bc456abf6}">
           <p14:sldIdLst>
             <p14:sldId id="288"/>
           </p14:sldIdLst>
@@ -16800,7 +16800,7 @@
               <a:buNone/>
             </a:pPr>
             <a:r>
-              <a:rPr lang="en-US" sz="866" dirty="0">
+              <a:rPr lang="en-US" sz="1194" dirty="0">
                 <a:solidFill>
                   <a:srgbClr val="5B6B78"/>
                 </a:solidFill>
@@ -16810,7 +16810,7 @@
               </a:rPr>
               <a:t>+0</a:t>
             </a:r>
-            <a:endParaRPr lang="en-US" sz="866" dirty="0"/>
+            <a:endParaRPr lang="en-US" sz="1194" dirty="0"/>
           </a:p>
         </p:txBody>
       </p:sp>
@@ -16845,7 +16845,7 @@
               <a:buNone/>
             </a:pPr>
             <a:r>
-              <a:rPr lang="en-US" sz="1066" b="1" dirty="0">
+              <a:rPr lang="en-US" sz="1394" b="1" dirty="0">
                 <a:solidFill>
                   <a:srgbClr val="FFFFFF"/>
                 </a:solidFill>
@@ -16855,7 +16855,7 @@
               </a:rPr>
               <a:t>magic "PRG2"</a:t>
             </a:r>
-            <a:endParaRPr lang="en-US" sz="1066" dirty="0"/>
+            <a:endParaRPr lang="en-US" sz="1394" dirty="0"/>
           </a:p>
         </p:txBody>
       </p:sp>
@@ -16884,7 +16884,7 @@
               <a:buNone/>
             </a:pPr>
             <a:r>
-              <a:rPr lang="en-US" sz="866" dirty="0">
+              <a:rPr lang="en-US" sz="1194" dirty="0">
                 <a:solidFill>
                   <a:srgbClr val="5B6B78"/>
                 </a:solidFill>
@@ -16894,7 +16894,7 @@
               </a:rPr>
               <a:t>4 bytes</a:t>
             </a:r>
-            <a:endParaRPr lang="en-US" sz="866" dirty="0"/>
+            <a:endParaRPr lang="en-US" sz="1194" dirty="0"/>
           </a:p>
         </p:txBody>
       </p:sp>
@@ -16923,7 +16923,7 @@
               <a:buNone/>
             </a:pPr>
             <a:r>
-              <a:rPr lang="en-US" sz="1066" dirty="0">
+              <a:rPr lang="en-US" sz="1394" dirty="0">
                 <a:solidFill>
                   <a:srgbClr val="1B2530"/>
                 </a:solidFill>
@@ -16933,7 +16933,7 @@
               </a:rPr>
               <a:t>format signature</a:t>
             </a:r>
-            <a:endParaRPr lang="en-US" sz="1066" dirty="0"/>
+            <a:endParaRPr lang="en-US" sz="1394" dirty="0"/>
           </a:p>
         </p:txBody>
       </p:sp>
@@ -16962,7 +16962,7 @@
               <a:buNone/>
             </a:pPr>
             <a:r>
-              <a:rPr lang="en-US" sz="866" dirty="0">
+              <a:rPr lang="en-US" sz="1194" dirty="0">
                 <a:solidFill>
                   <a:srgbClr val="5B6B78"/>
                 </a:solidFill>
@@ -16972,7 +16972,7 @@
               </a:rPr>
               <a:t>+4</a:t>
             </a:r>
-            <a:endParaRPr lang="en-US" sz="866" dirty="0"/>
+            <a:endParaRPr lang="en-US" sz="1194" dirty="0"/>
           </a:p>
         </p:txBody>
       </p:sp>
@@ -17007,7 +17007,7 @@
               <a:buNone/>
             </a:pPr>
             <a:r>
-              <a:rPr lang="en-US" sz="1066" b="1" dirty="0">
+              <a:rPr lang="en-US" sz="1394" b="1" dirty="0">
                 <a:solidFill>
                   <a:srgbClr val="FFFFFF"/>
                 </a:solidFill>
@@ -17017,7 +17017,7 @@
               </a:rPr>
               <a:t>abi_major, abi_minor</a:t>
             </a:r>
-            <a:endParaRPr lang="en-US" sz="1066" dirty="0"/>
+            <a:endParaRPr lang="en-US" sz="1394" dirty="0"/>
           </a:p>
         </p:txBody>
       </p:sp>
@@ -17046,7 +17046,7 @@
               <a:buNone/>
             </a:pPr>
             <a:r>
-              <a:rPr lang="en-US" sz="866" dirty="0">
+              <a:rPr lang="en-US" sz="1194" dirty="0">
                 <a:solidFill>
                   <a:srgbClr val="5B6B78"/>
                 </a:solidFill>
@@ -17056,7 +17056,7 @@
               </a:rPr>
               <a:t>4 bytes</a:t>
             </a:r>
-            <a:endParaRPr lang="en-US" sz="866" dirty="0"/>
+            <a:endParaRPr lang="en-US" sz="1194" dirty="0"/>
           </a:p>
         </p:txBody>
       </p:sp>
@@ -17085,7 +17085,7 @@
               <a:buNone/>
             </a:pPr>
             <a:r>
-              <a:rPr lang="en-US" sz="1066" dirty="0">
+              <a:rPr lang="en-US" sz="1394" dirty="0">
                 <a:solidFill>
                   <a:srgbClr val="1B2530"/>
                 </a:solidFill>
@@ -17095,7 +17095,7 @@
               </a:rPr>
               <a:t>two uint16</a:t>
             </a:r>
-            <a:endParaRPr lang="en-US" sz="1066" dirty="0"/>
+            <a:endParaRPr lang="en-US" sz="1394" dirty="0"/>
           </a:p>
         </p:txBody>
       </p:sp>
@@ -17124,7 +17124,7 @@
               <a:buNone/>
             </a:pPr>
             <a:r>
-              <a:rPr lang="en-US" sz="866" dirty="0">
+              <a:rPr lang="en-US" sz="1194" dirty="0">
                 <a:solidFill>
                   <a:srgbClr val="5B6B78"/>
                 </a:solidFill>
@@ -17134,7 +17134,7 @@
               </a:rPr>
               <a:t>+8</a:t>
             </a:r>
-            <a:endParaRPr lang="en-US" sz="866" dirty="0"/>
+            <a:endParaRPr lang="en-US" sz="1194" dirty="0"/>
           </a:p>
         </p:txBody>
       </p:sp>
@@ -17169,7 +17169,7 @@
               <a:buNone/>
             </a:pPr>
             <a:r>
-              <a:rPr lang="en-US" sz="1066" b="1" dirty="0">
+              <a:rPr lang="en-US" sz="1394" b="1" dirty="0">
                 <a:solidFill>
                   <a:srgbClr val="FFFFFF"/>
                 </a:solidFill>
@@ -17179,7 +17179,7 @@
               </a:rPr>
               <a:t>header_size, flags</a:t>
             </a:r>
-            <a:endParaRPr lang="en-US" sz="1066" dirty="0"/>
+            <a:endParaRPr lang="en-US" sz="1394" dirty="0"/>
           </a:p>
         </p:txBody>
       </p:sp>
@@ -17208,7 +17208,7 @@
               <a:buNone/>
             </a:pPr>
             <a:r>
-              <a:rPr lang="en-US" sz="866" dirty="0">
+              <a:rPr lang="en-US" sz="1194" dirty="0">
                 <a:solidFill>
                   <a:srgbClr val="5B6B78"/>
                 </a:solidFill>
@@ -17218,7 +17218,7 @@
               </a:rPr>
               <a:t>4 bytes</a:t>
             </a:r>
-            <a:endParaRPr lang="en-US" sz="866" dirty="0"/>
+            <a:endParaRPr lang="en-US" sz="1194" dirty="0"/>
           </a:p>
         </p:txBody>
       </p:sp>
@@ -17247,7 +17247,7 @@
               <a:buNone/>
             </a:pPr>
             <a:r>
-              <a:rPr lang="en-US" sz="1066" dirty="0">
+              <a:rPr lang="en-US" sz="1394" dirty="0">
                 <a:solidFill>
                   <a:srgbClr val="1B2530"/>
                 </a:solidFill>
@@ -17257,7 +17257,7 @@
               </a:rPr>
               <a:t>100; bit 2 = ABI table</a:t>
             </a:r>
-            <a:endParaRPr lang="en-US" sz="1066" dirty="0"/>
+            <a:endParaRPr lang="en-US" sz="1394" dirty="0"/>
           </a:p>
         </p:txBody>
       </p:sp>
@@ -17286,7 +17286,7 @@
               <a:buNone/>
             </a:pPr>
             <a:r>
-              <a:rPr lang="en-US" sz="866" dirty="0">
+              <a:rPr lang="en-US" sz="1194" dirty="0">
                 <a:solidFill>
                   <a:srgbClr val="5B6B78"/>
                 </a:solidFill>
@@ -17296,7 +17296,7 @@
               </a:rPr>
               <a:t>+12</a:t>
             </a:r>
-            <a:endParaRPr lang="en-US" sz="866" dirty="0"/>
+            <a:endParaRPr lang="en-US" sz="1194" dirty="0"/>
           </a:p>
         </p:txBody>
       </p:sp>
@@ -17331,7 +17331,7 @@
               <a:buNone/>
             </a:pPr>
             <a:r>
-              <a:rPr lang="en-US" sz="1066" b="1" dirty="0">
+              <a:rPr lang="en-US" sz="1394" b="1" dirty="0">
                 <a:solidFill>
                   <a:srgbClr val="FFFFFF"/>
                 </a:solidFill>
@@ -17341,7 +17341,7 @@
               </a:rPr>
               <a:t>load_addr</a:t>
             </a:r>
-            <a:endParaRPr lang="en-US" sz="1066" dirty="0"/>
+            <a:endParaRPr lang="en-US" sz="1394" dirty="0"/>
           </a:p>
         </p:txBody>
       </p:sp>
@@ -17370,7 +17370,7 @@
               <a:buNone/>
             </a:pPr>
             <a:r>
-              <a:rPr lang="en-US" sz="866" dirty="0">
+              <a:rPr lang="en-US" sz="1194" dirty="0">
                 <a:solidFill>
                   <a:srgbClr val="5B6B78"/>
                 </a:solidFill>
@@ -17380,7 +17380,7 @@
               </a:rPr>
               <a:t>4 bytes</a:t>
             </a:r>
-            <a:endParaRPr lang="en-US" sz="866" dirty="0"/>
+            <a:endParaRPr lang="en-US" sz="1194" dirty="0"/>
           </a:p>
         </p:txBody>
       </p:sp>
@@ -17409,7 +17409,7 @@
               <a:buNone/>
             </a:pPr>
             <a:r>
-              <a:rPr lang="en-US" sz="1066" dirty="0">
+              <a:rPr lang="en-US" sz="1394" dirty="0">
                 <a:solidFill>
                   <a:srgbClr val="1B2530"/>
                 </a:solidFill>
@@ -17419,7 +17419,7 @@
               </a:rPr>
               <a:t>0x40800000</a:t>
             </a:r>
-            <a:endParaRPr lang="en-US" sz="1066" dirty="0"/>
+            <a:endParaRPr lang="en-US" sz="1394" dirty="0"/>
           </a:p>
         </p:txBody>
       </p:sp>
@@ -17448,7 +17448,7 @@
               <a:buNone/>
             </a:pPr>
             <a:r>
-              <a:rPr lang="en-US" sz="866" dirty="0">
+              <a:rPr lang="en-US" sz="1194" dirty="0">
                 <a:solidFill>
                   <a:srgbClr val="5B6B78"/>
                 </a:solidFill>
@@ -17458,7 +17458,7 @@
               </a:rPr>
               <a:t>+16</a:t>
             </a:r>
-            <a:endParaRPr lang="en-US" sz="866" dirty="0"/>
+            <a:endParaRPr lang="en-US" sz="1194" dirty="0"/>
           </a:p>
         </p:txBody>
       </p:sp>
@@ -17493,7 +17493,7 @@
               <a:buNone/>
             </a:pPr>
             <a:r>
-              <a:rPr lang="en-US" sz="1066" b="1" dirty="0">
+              <a:rPr lang="en-US" sz="1394" b="1" dirty="0">
                 <a:solidFill>
                   <a:srgbClr val="FFFFFF"/>
                 </a:solidFill>
@@ -17503,7 +17503,7 @@
               </a:rPr>
               <a:t>code_size, mem_size</a:t>
             </a:r>
-            <a:endParaRPr lang="en-US" sz="1066" dirty="0"/>
+            <a:endParaRPr lang="en-US" sz="1394" dirty="0"/>
           </a:p>
         </p:txBody>
       </p:sp>
@@ -17532,7 +17532,7 @@
               <a:buNone/>
             </a:pPr>
             <a:r>
-              <a:rPr lang="en-US" sz="866" dirty="0">
+              <a:rPr lang="en-US" sz="1194" dirty="0">
                 <a:solidFill>
                   <a:srgbClr val="5B6B78"/>
                 </a:solidFill>
@@ -17542,7 +17542,7 @@
               </a:rPr>
               <a:t>8 bytes</a:t>
             </a:r>
-            <a:endParaRPr lang="en-US" sz="866" dirty="0"/>
+            <a:endParaRPr lang="en-US" sz="1194" dirty="0"/>
           </a:p>
         </p:txBody>
       </p:sp>
@@ -17571,7 +17571,7 @@
               <a:buNone/>
             </a:pPr>
             <a:r>
-              <a:rPr lang="en-US" sz="1066" dirty="0">
+              <a:rPr lang="en-US" sz="1394" dirty="0">
                 <a:solidFill>
                   <a:srgbClr val="1B2530"/>
                 </a:solidFill>
@@ -17581,7 +17581,7 @@
               </a:rPr>
               <a:t>bytes to copy; bytes to reserve</a:t>
             </a:r>
-            <a:endParaRPr lang="en-US" sz="1066" dirty="0"/>
+            <a:endParaRPr lang="en-US" sz="1394" dirty="0"/>
           </a:p>
         </p:txBody>
       </p:sp>
@@ -17610,7 +17610,7 @@
               <a:buNone/>
             </a:pPr>
             <a:r>
-              <a:rPr lang="en-US" sz="866" dirty="0">
+              <a:rPr lang="en-US" sz="1194" dirty="0">
                 <a:solidFill>
                   <a:srgbClr val="5B6B78"/>
                 </a:solidFill>
@@ -17620,7 +17620,7 @@
               </a:rPr>
               <a:t>+24</a:t>
             </a:r>
-            <a:endParaRPr lang="en-US" sz="866" dirty="0"/>
+            <a:endParaRPr lang="en-US" sz="1194" dirty="0"/>
           </a:p>
         </p:txBody>
       </p:sp>
@@ -17655,7 +17655,7 @@
               <a:buNone/>
             </a:pPr>
             <a:r>
-              <a:rPr lang="en-US" sz="1066" b="1" dirty="0">
+              <a:rPr lang="en-US" sz="1394" b="1" dirty="0">
                 <a:solidFill>
                   <a:srgbClr val="FFFFFF"/>
                 </a:solidFill>
@@ -17665,7 +17665,7 @@
               </a:rPr>
               <a:t>init, update, draw offsets</a:t>
             </a:r>
-            <a:endParaRPr lang="en-US" sz="1066" dirty="0"/>
+            <a:endParaRPr lang="en-US" sz="1394" dirty="0"/>
           </a:p>
         </p:txBody>
       </p:sp>
@@ -17694,7 +17694,7 @@
               <a:buNone/>
             </a:pPr>
             <a:r>
-              <a:rPr lang="en-US" sz="866" dirty="0">
+              <a:rPr lang="en-US" sz="1194" dirty="0">
                 <a:solidFill>
                   <a:srgbClr val="5B6B78"/>
                 </a:solidFill>
@@ -17704,7 +17704,7 @@
               </a:rPr>
               <a:t>12 bytes</a:t>
             </a:r>
-            <a:endParaRPr lang="en-US" sz="866" dirty="0"/>
+            <a:endParaRPr lang="en-US" sz="1194" dirty="0"/>
           </a:p>
         </p:txBody>
       </p:sp>
@@ -17733,7 +17733,7 @@
               <a:buNone/>
             </a:pPr>
             <a:r>
-              <a:rPr lang="en-US" sz="1066" dirty="0">
+              <a:rPr lang="en-US" sz="1394" dirty="0">
                 <a:solidFill>
                   <a:srgbClr val="1B2530"/>
                 </a:solidFill>
@@ -17743,7 +17743,7 @@
               </a:rPr>
               <a:t>three uint32 entry points</a:t>
             </a:r>
-            <a:endParaRPr lang="en-US" sz="1066" dirty="0"/>
+            <a:endParaRPr lang="en-US" sz="1394" dirty="0"/>
           </a:p>
         </p:txBody>
       </p:sp>
@@ -17772,7 +17772,7 @@
               <a:buNone/>
             </a:pPr>
             <a:r>
-              <a:rPr lang="en-US" sz="866" dirty="0">
+              <a:rPr lang="en-US" sz="1194" dirty="0">
                 <a:solidFill>
                   <a:srgbClr val="5B6B78"/>
                 </a:solidFill>
@@ -17782,7 +17782,7 @@
               </a:rPr>
               <a:t>+36</a:t>
             </a:r>
-            <a:endParaRPr lang="en-US" sz="866" dirty="0"/>
+            <a:endParaRPr lang="en-US" sz="1194" dirty="0"/>
           </a:p>
         </p:txBody>
       </p:sp>
@@ -17817,7 +17817,7 @@
               <a:buNone/>
             </a:pPr>
             <a:r>
-              <a:rPr lang="en-US" sz="1066" b="1" dirty="0">
+              <a:rPr lang="en-US" sz="1394" b="1" dirty="0">
                 <a:solidFill>
                   <a:srgbClr val="FFFFFF"/>
                 </a:solidFill>
@@ -17827,7 +17827,7 @@
               </a:rPr>
               <a:t>payload_crc32</a:t>
             </a:r>
-            <a:endParaRPr lang="en-US" sz="1066" dirty="0"/>
+            <a:endParaRPr lang="en-US" sz="1394" dirty="0"/>
           </a:p>
         </p:txBody>
       </p:sp>
@@ -17856,7 +17856,7 @@
               <a:buNone/>
             </a:pPr>
             <a:r>
-              <a:rPr lang="en-US" sz="866" dirty="0">
+              <a:rPr lang="en-US" sz="1194" dirty="0">
                 <a:solidFill>
                   <a:srgbClr val="5B6B78"/>
                 </a:solidFill>
@@ -17866,7 +17866,7 @@
               </a:rPr>
               <a:t>4 bytes</a:t>
             </a:r>
-            <a:endParaRPr lang="en-US" sz="866" dirty="0"/>
+            <a:endParaRPr lang="en-US" sz="1194" dirty="0"/>
           </a:p>
         </p:txBody>
       </p:sp>
@@ -17895,7 +17895,7 @@
               <a:buNone/>
             </a:pPr>
             <a:r>
-              <a:rPr lang="en-US" sz="1066" dirty="0">
+              <a:rPr lang="en-US" sz="1394" dirty="0">
                 <a:solidFill>
                   <a:srgbClr val="1B2530"/>
                 </a:solidFill>
@@ -17905,7 +17905,7 @@
               </a:rPr>
               <a:t>integrity of the code</a:t>
             </a:r>
-            <a:endParaRPr lang="en-US" sz="1066" dirty="0"/>
+            <a:endParaRPr lang="en-US" sz="1394" dirty="0"/>
           </a:p>
         </p:txBody>
       </p:sp>
@@ -17934,7 +17934,7 @@
               <a:buNone/>
             </a:pPr>
             <a:r>
-              <a:rPr lang="en-US" sz="866" dirty="0">
+              <a:rPr lang="en-US" sz="1194" dirty="0">
                 <a:solidFill>
                   <a:srgbClr val="5B6B78"/>
                 </a:solidFill>
@@ -17944,7 +17944,7 @@
               </a:rPr>
               <a:t>+40</a:t>
             </a:r>
-            <a:endParaRPr lang="en-US" sz="866" dirty="0"/>
+            <a:endParaRPr lang="en-US" sz="1194" dirty="0"/>
           </a:p>
         </p:txBody>
       </p:sp>
@@ -17979,7 +17979,7 @@
               <a:buNone/>
             </a:pPr>
             <a:r>
-              <a:rPr lang="en-US" sz="1066" b="1" dirty="0">
+              <a:rPr lang="en-US" sz="1394" b="1" dirty="0">
                 <a:solidFill>
                   <a:srgbClr val="FFFFFF"/>
                 </a:solidFill>
@@ -17989,7 +17989,7 @@
               </a:rPr>
               <a:t>name</a:t>
             </a:r>
-            <a:endParaRPr lang="en-US" sz="1066" dirty="0"/>
+            <a:endParaRPr lang="en-US" sz="1394" dirty="0"/>
           </a:p>
         </p:txBody>
       </p:sp>
@@ -18018,7 +18018,7 @@
               <a:buNone/>
             </a:pPr>
             <a:r>
-              <a:rPr lang="en-US" sz="866" dirty="0">
+              <a:rPr lang="en-US" sz="1194" dirty="0">
                 <a:solidFill>
                   <a:srgbClr val="5B6B78"/>
                 </a:solidFill>
@@ -18028,7 +18028,7 @@
               </a:rPr>
               <a:t>32 bytes</a:t>
             </a:r>
-            <a:endParaRPr lang="en-US" sz="866" dirty="0"/>
+            <a:endParaRPr lang="en-US" sz="1194" dirty="0"/>
           </a:p>
         </p:txBody>
       </p:sp>
@@ -18057,7 +18057,7 @@
               <a:buNone/>
             </a:pPr>
             <a:r>
-              <a:rPr lang="en-US" sz="1066" dirty="0">
+              <a:rPr lang="en-US" sz="1394" dirty="0">
                 <a:solidFill>
                   <a:srgbClr val="1B2530"/>
                 </a:solidFill>
@@ -18067,7 +18067,7 @@
               </a:rPr>
               <a:t>shown in the menu</a:t>
             </a:r>
-            <a:endParaRPr lang="en-US" sz="1066" dirty="0"/>
+            <a:endParaRPr lang="en-US" sz="1394" dirty="0"/>
           </a:p>
         </p:txBody>
       </p:sp>
@@ -18096,7 +18096,7 @@
               <a:buNone/>
             </a:pPr>
             <a:r>
-              <a:rPr lang="en-US" sz="866" dirty="0">
+              <a:rPr lang="en-US" sz="1194" dirty="0">
                 <a:solidFill>
                   <a:srgbClr val="5B6B78"/>
                 </a:solidFill>
@@ -18106,7 +18106,7 @@
               </a:rPr>
               <a:t>+72</a:t>
             </a:r>
-            <a:endParaRPr lang="en-US" sz="866" dirty="0"/>
+            <a:endParaRPr lang="en-US" sz="1194" dirty="0"/>
           </a:p>
         </p:txBody>
       </p:sp>
@@ -18141,7 +18141,7 @@
               <a:buNone/>
             </a:pPr>
             <a:r>
-              <a:rPr lang="en-US" sz="1066" b="1" dirty="0">
+              <a:rPr lang="en-US" sz="1194" b="1" dirty="0">
                 <a:solidFill>
                   <a:srgbClr val="FFFFFF"/>
                 </a:solidFill>
@@ -18151,7 +18151,7 @@
               </a:rPr>
               <a:t>abi_hash, features, isa, relocs, import_model</a:t>
             </a:r>
-            <a:endParaRPr lang="en-US" sz="1066" dirty="0"/>
+            <a:endParaRPr lang="en-US" sz="1194" dirty="0"/>
           </a:p>
         </p:txBody>
       </p:sp>
@@ -18180,7 +18180,7 @@
               <a:buNone/>
             </a:pPr>
             <a:r>
-              <a:rPr lang="en-US" sz="866" dirty="0">
+              <a:rPr lang="en-US" sz="1194" dirty="0">
                 <a:solidFill>
                   <a:srgbClr val="5B6B78"/>
                 </a:solidFill>
@@ -18190,7 +18190,7 @@
               </a:rPr>
               <a:t>28 bytes</a:t>
             </a:r>
-            <a:endParaRPr lang="en-US" sz="866" dirty="0"/>
+            <a:endParaRPr lang="en-US" sz="1194" dirty="0"/>
           </a:p>
         </p:txBody>
       </p:sp>
@@ -18219,7 +18219,7 @@
               <a:buNone/>
             </a:pPr>
             <a:r>
-              <a:rPr lang="en-US" sz="1066" dirty="0">
+              <a:rPr lang="en-US" sz="1394" dirty="0">
                 <a:solidFill>
                   <a:srgbClr val="1B2530"/>
                 </a:solidFill>
@@ -18229,7 +18229,7 @@
               </a:rPr>
               <a:t>version-2 fields: compatibility</a:t>
             </a:r>
-            <a:endParaRPr lang="en-US" sz="1066" dirty="0"/>
+            <a:endParaRPr lang="en-US" sz="1394" dirty="0"/>
           </a:p>
         </p:txBody>
       </p:sp>
